--- a/classes/parte-9-forense-digital-y-respuesta-a-incidentes/213-anti-forense-y-sus-contramedidas/clase-213-presentacion.pptx
+++ b/classes/parte-9-forense-digital-y-respuesta-a-incidentes/213-anti-forense-y-sus-contramedidas/clase-213-presentacion.pptx
@@ -17,6 +17,11 @@
     <p:sldId id="265" r:id="rId16"/>
     <p:sldId id="266" r:id="rId17"/>
     <p:sldId id="267" r:id="rId18"/>
+    <p:sldId id="268" r:id="rId19"/>
+    <p:sldId id="269" r:id="rId20"/>
+    <p:sldId id="270" r:id="rId21"/>
+    <p:sldId id="271" r:id="rId22"/>
+    <p:sldId id="272" r:id="rId23"/>
   </p:sldIdLst>
   <p:sldSz cx="9144000" cy="6858000" type="screen4x3"/>
   <p:notesSz cx="6858000" cy="9144000"/>
@@ -3198,7 +3203,7 @@
                   <a:srgbClr val="0B3D2E"/>
                 </a:solidFill>
               </a:rPr>
-              <a:t>⚠️ Errores comunes</a:t>
+              <a:t>🧰 Herramientas y preparación</a:t>
             </a:r>
           </a:p>
         </p:txBody>
@@ -3236,67 +3241,37 @@
                   <a:srgbClr val="22282E"/>
                 </a:solidFill>
               </a:rPr>
-              <a:t>•  Confías en un solo timestamp — Es manipulable. Cruza $SI, $FN, $UsnJrnl y logs.</a:t>
-            </a:r>
-          </a:p>
-          <a:p>
-            <a:pPr>
-              <a:spcAft>
-                <a:spcPts val="600"/>
-              </a:spcAft>
-            </a:pPr>
-            <a:r>
-              <a:rPr sz="1500">
-                <a:solidFill>
-                  <a:srgbClr val="22282E"/>
-                </a:solidFill>
-              </a:rPr>
-              <a:t>•  No ves el ADS — dir normal no lo muestra. Usa dir /r o streams.</a:t>
-            </a:r>
-          </a:p>
-          <a:p>
-            <a:pPr>
-              <a:spcAft>
-                <a:spcPts val="600"/>
-              </a:spcAft>
-            </a:pPr>
-            <a:r>
-              <a:rPr sz="1500">
-                <a:solidFill>
-                  <a:srgbClr val="22282E"/>
-                </a:solidFill>
-              </a:rPr>
-              <a:t>•  Log "limpio" sin sospecha — Un log vacío o con gaps ya es sospechoso. Revisa el evento 1102.</a:t>
-            </a:r>
-          </a:p>
-          <a:p>
-            <a:pPr>
-              <a:spcAft>
-                <a:spcPts val="600"/>
-              </a:spcAft>
-            </a:pPr>
-            <a:r>
-              <a:rPr sz="1500">
-                <a:solidFill>
-                  <a:srgbClr val="22282E"/>
-                </a:solidFill>
-              </a:rPr>
-              <a:t>•  Esteganografía indetectable — Prueba varias herramientas y análisis estadístico; compara con el portador original si existe.</a:t>
-            </a:r>
-          </a:p>
-          <a:p>
-            <a:pPr>
-              <a:spcAft>
-                <a:spcPts val="600"/>
-              </a:spcAft>
-            </a:pPr>
-            <a:r>
-              <a:rPr sz="1500">
-                <a:solidFill>
-                  <a:srgbClr val="22282E"/>
-                </a:solidFill>
-              </a:rPr>
-              <a:t>•  Asumes que el wiping borró todo — Copias en shadow copies, journal, backups o RAM pueden sobrevivir.</a:t>
+              <a:t>•  Detección: MFTECmd ($SI vs $FN), EvtxECmd (gaps de secuencia), streams/dir /r (ADS), stegdetect/zsteg (esteganografía), binwalk.</a:t>
+            </a:r>
+          </a:p>
+          <a:p>
+            <a:pPr>
+              <a:spcAft>
+                <a:spcPts val="600"/>
+              </a:spcAft>
+            </a:pPr>
+            <a:r>
+              <a:rPr sz="1500">
+                <a:solidFill>
+                  <a:srgbClr val="22282E"/>
+                </a:solidFill>
+              </a:rPr>
+              <a:t>•  Análisis de wiping: inspección de patrones en espacio no asignado.</a:t>
+            </a:r>
+          </a:p>
+          <a:p>
+            <a:pPr>
+              <a:spcAft>
+                <a:spcPts val="600"/>
+              </a:spcAft>
+            </a:pPr>
+            <a:r>
+              <a:rPr sz="1500">
+                <a:solidFill>
+                  <a:srgbClr val="22282E"/>
+                </a:solidFill>
+              </a:rPr>
+              <a:t>•  Entorno: laboratorio propio. Genera tú las técnicas y luego detéctalas.</a:t>
             </a:r>
           </a:p>
         </p:txBody>
@@ -3347,7 +3322,7 @@
                   <a:srgbClr val="0B3D2E"/>
                 </a:solidFill>
               </a:rPr>
-              <a:t>❓ Preguntas frecuentes</a:t>
+              <a:t>🧪 Laboratorio guiado</a:t>
             </a:r>
           </a:p>
         </p:txBody>
@@ -3385,97 +3360,97 @@
                   <a:srgbClr val="22282E"/>
                 </a:solidFill>
               </a:rPr>
-              <a:t>•  ❓ ¿El anti-forense hace imposible la investigación?</a:t>
-            </a:r>
-          </a:p>
-          <a:p>
-            <a:pPr>
-              <a:spcAft>
-                <a:spcPts val="600"/>
-              </a:spcAft>
-            </a:pPr>
-            <a:r>
-              <a:rPr sz="1500">
-                <a:solidFill>
-                  <a:srgbClr val="22282E"/>
-                </a:solidFill>
-              </a:rPr>
-              <a:t>•  Casi nunca del todo. Deja sus propias huellas (incoherencias, huecos) y suele olvidar fuentes redundantes.</a:t>
-            </a:r>
-          </a:p>
-          <a:p>
-            <a:pPr>
-              <a:spcAft>
-                <a:spcPts val="600"/>
-              </a:spcAft>
-            </a:pPr>
-            <a:r>
-              <a:rPr sz="1500">
-                <a:solidFill>
-                  <a:srgbClr val="22282E"/>
-                </a:solidFill>
-              </a:rPr>
-              <a:t>•  ❓ ¿Cómo detecto timestomping?</a:t>
-            </a:r>
-          </a:p>
-          <a:p>
-            <a:pPr>
-              <a:spcAft>
-                <a:spcPts val="600"/>
-              </a:spcAft>
-            </a:pPr>
-            <a:r>
-              <a:rPr sz="1500">
-                <a:solidFill>
-                  <a:srgbClr val="22282E"/>
-                </a:solidFill>
-              </a:rPr>
-              <a:t>•  Comparando timestamps que deberían concordar entre fuentes independientes; las incoherencias delatan la manipulación.</a:t>
-            </a:r>
-          </a:p>
-          <a:p>
-            <a:pPr>
-              <a:spcAft>
-                <a:spcPts val="600"/>
-              </a:spcAft>
-            </a:pPr>
-            <a:r>
-              <a:rPr sz="1500">
-                <a:solidFill>
-                  <a:srgbClr val="22282E"/>
-                </a:solidFill>
-              </a:rPr>
-              <a:t>•  ❓ ¿Qué es un LOLBin?</a:t>
-            </a:r>
-          </a:p>
-          <a:p>
-            <a:pPr>
-              <a:spcAft>
-                <a:spcPts val="600"/>
-              </a:spcAft>
-            </a:pPr>
-            <a:r>
-              <a:rPr sz="1500">
-                <a:solidFill>
-                  <a:srgbClr val="22282E"/>
-                </a:solidFill>
-              </a:rPr>
-              <a:t>•  Un binario legítimo del sistema (PowerShell, certutil, rundll32…) usado con fines maliciosos para no dejar malware propio.</a:t>
-            </a:r>
-          </a:p>
-          <a:p>
-            <a:pPr>
-              <a:spcAft>
-                <a:spcPts val="600"/>
-              </a:spcAft>
-            </a:pPr>
-            <a:r>
-              <a:rPr sz="1500">
-                <a:solidFill>
-                  <a:srgbClr val="22282E"/>
-                </a:solidFill>
-              </a:rPr>
-              <a:t>•  ❓ ¿Puedo recuperar algo tras un wipe en SSD?</a:t>
+              <a:t>•  Timestomping y su detección: cambia el mtime de un archivo propio y detéctalo comparando $SI vs $FN en la MFT:</a:t>
+            </a:r>
+          </a:p>
+          <a:p>
+            <a:pPr>
+              <a:spcAft>
+                <a:spcPts val="600"/>
+              </a:spcAft>
+            </a:pPr>
+            <a:r>
+              <a:rPr sz="1500">
+                <a:solidFill>
+                  <a:srgbClr val="22282E"/>
+                </a:solidFill>
+              </a:rPr>
+              <a:t>•  Busca registros donde los tiempos de $SI sean anteriores a los de $FN (imposible en uso normal).</a:t>
+            </a:r>
+          </a:p>
+          <a:p>
+            <a:pPr>
+              <a:spcAft>
+                <a:spcPts val="600"/>
+              </a:spcAft>
+            </a:pPr>
+            <a:r>
+              <a:rPr sz="1500">
+                <a:solidFill>
+                  <a:srgbClr val="22282E"/>
+                </a:solidFill>
+              </a:rPr>
+              <a:t>•  Alternate Data Streams: crea y detecta un ADS en NTFS:</a:t>
+            </a:r>
+          </a:p>
+          <a:p>
+            <a:pPr>
+              <a:spcAft>
+                <a:spcPts val="600"/>
+              </a:spcAft>
+            </a:pPr>
+            <a:r>
+              <a:rPr sz="1500">
+                <a:solidFill>
+                  <a:srgbClr val="22282E"/>
+                </a:solidFill>
+              </a:rPr>
+              <a:t>•  Limpieza de logs: borra un log de eventos propio y detecta el hueco:</a:t>
+            </a:r>
+          </a:p>
+          <a:p>
+            <a:pPr>
+              <a:spcAft>
+                <a:spcPts val="600"/>
+              </a:spcAft>
+            </a:pPr>
+            <a:r>
+              <a:rPr sz="1500">
+                <a:solidFill>
+                  <a:srgbClr val="22282E"/>
+                </a:solidFill>
+              </a:rPr>
+              <a:t>•  El evento 1102 registra que se limpió el registro de auditoría cuando Windows logra generarlo y conservarlo; búscalo también en colectores remotos.</a:t>
+            </a:r>
+          </a:p>
+          <a:p>
+            <a:pPr>
+              <a:spcAft>
+                <a:spcPts val="600"/>
+              </a:spcAft>
+            </a:pPr>
+            <a:r>
+              <a:rPr sz="1500">
+                <a:solidFill>
+                  <a:srgbClr val="22282E"/>
+                </a:solidFill>
+              </a:rPr>
+              <a:t>•  Esteganografía: esconde un texto en una imagen propia y detéctalo:</a:t>
+            </a:r>
+          </a:p>
+          <a:p>
+            <a:pPr>
+              <a:spcAft>
+                <a:spcPts val="600"/>
+              </a:spcAft>
+            </a:pPr>
+            <a:r>
+              <a:rPr sz="1500">
+                <a:solidFill>
+                  <a:srgbClr val="22282E"/>
+                </a:solidFill>
+              </a:rPr>
+              <a:t>•  Wiping: sobrescribe un archivo y observa el espacio no asignado; discute por qué el patrón (o su ausencia) es una pista.</a:t>
             </a:r>
           </a:p>
         </p:txBody>
@@ -3526,7 +3501,7 @@
                   <a:srgbClr val="0B3D2E"/>
                 </a:solidFill>
               </a:rPr>
-              <a:t>🔗 Referencias</a:t>
+              <a:t>✍️ Ejercicios</a:t>
             </a:r>
           </a:p>
         </p:txBody>
@@ -3564,56 +3539,757 @@
                   <a:srgbClr val="22282E"/>
                 </a:solidFill>
               </a:rPr>
-              <a:t>•  Ligh, Case, Levy, Walters — The Art of Memory Forensics, Wiley 2014.</a:t>
-            </a:r>
-          </a:p>
-          <a:p>
-            <a:pPr>
-              <a:spcAft>
-                <a:spcPts val="600"/>
-              </a:spcAft>
-            </a:pPr>
-            <a:r>
-              <a:rPr sz="1500">
-                <a:solidFill>
-                  <a:srgbClr val="22282E"/>
-                </a:solidFill>
-              </a:rPr>
-              <a:t>•  MITRE ATT&amp;CK — Defense Evasion (TA0005): &lt;https://attack.mitre.org/tactics/TA0005/&gt;</a:t>
-            </a:r>
-          </a:p>
-          <a:p>
-            <a:pPr>
-              <a:spcAft>
-                <a:spcPts val="600"/>
-              </a:spcAft>
-            </a:pPr>
-            <a:r>
-              <a:rPr sz="1500">
-                <a:solidFill>
-                  <a:srgbClr val="22282E"/>
-                </a:solidFill>
-              </a:rPr>
-              <a:t>•  Eric Zimmerman's Tools: &lt;https://ericzimmerman.github.io/&gt;</a:t>
-            </a:r>
-          </a:p>
-          <a:p>
-            <a:pPr>
-              <a:spcAft>
-                <a:spcPts val="600"/>
-              </a:spcAft>
-            </a:pPr>
-            <a:r>
-              <a:rPr sz="1500">
-                <a:solidFill>
-                  <a:srgbClr val="22282E"/>
-                </a:solidFill>
-              </a:rPr>
-              <a:t>•  LOLBAS project: &lt;https://lolbas-project.github.io/&gt;</a:t>
-            </a:r>
-          </a:p>
-        </p:txBody>
-      </p:sp>
+              <a:t>•  Detecta timestomping por incoherencia $SI/$FN.</a:t>
+            </a:r>
+          </a:p>
+          <a:p>
+            <a:pPr>
+              <a:spcAft>
+                <a:spcPts val="600"/>
+              </a:spcAft>
+            </a:pPr>
+            <a:r>
+              <a:rPr sz="1500">
+                <a:solidFill>
+                  <a:srgbClr val="22282E"/>
+                </a:solidFill>
+              </a:rPr>
+              <a:t>•  Crea y encuentra un ADS en NTFS.</a:t>
+            </a:r>
+          </a:p>
+          <a:p>
+            <a:pPr>
+              <a:spcAft>
+                <a:spcPts val="600"/>
+              </a:spcAft>
+            </a:pPr>
+            <a:r>
+              <a:rPr sz="1500">
+                <a:solidFill>
+                  <a:srgbClr val="22282E"/>
+                </a:solidFill>
+              </a:rPr>
+              <a:t>•  Identifica una limpieza de log por el evento 1102.</a:t>
+            </a:r>
+          </a:p>
+          <a:p>
+            <a:pPr>
+              <a:spcAft>
+                <a:spcPts val="600"/>
+              </a:spcAft>
+            </a:pPr>
+            <a:r>
+              <a:rPr sz="1500">
+                <a:solidFill>
+                  <a:srgbClr val="22282E"/>
+                </a:solidFill>
+              </a:rPr>
+              <a:t>•  Detecta datos ocultos en una imagen con zsteg/binwalk.</a:t>
+            </a:r>
+          </a:p>
+          <a:p>
+            <a:pPr>
+              <a:spcAft>
+                <a:spcPts val="600"/>
+              </a:spcAft>
+            </a:pPr>
+            <a:r>
+              <a:rPr sz="1500">
+                <a:solidFill>
+                  <a:srgbClr val="22282E"/>
+                </a:solidFill>
+              </a:rPr>
+              <a:t>•  Explica por qué el TRIM ayuda al atacante que quiere borrar.</a:t>
+            </a:r>
+          </a:p>
+          <a:p>
+            <a:pPr>
+              <a:spcAft>
+                <a:spcPts val="600"/>
+              </a:spcAft>
+            </a:pPr>
+            <a:r>
+              <a:rPr sz="1500">
+                <a:solidFill>
+                  <a:srgbClr val="22282E"/>
+                </a:solidFill>
+              </a:rPr>
+              <a:t>•  Diseña una estrategia de redundancia de evidencia contra cada técnica.</a:t>
+            </a:r>
+          </a:p>
+        </p:txBody>
+      </p:sp>
+    </p:spTree>
+  </p:cSld>
+  <p:clrMapOvr>
+    <a:masterClrMapping/>
+  </p:clrMapOvr>
+</p:sld>
+</file>
+
+<file path=ppt/slides/slide13.xml><?xml version="1.0" encoding="utf-8"?>
+<p:sld xmlns:a="http://schemas.openxmlformats.org/drawingml/2006/main" xmlns:p="http://schemas.openxmlformats.org/presentationml/2006/main" xmlns:r="http://schemas.openxmlformats.org/officeDocument/2006/relationships">
+  <p:cSld>
+    <p:spTree>
+      <p:nvGrpSpPr>
+        <p:cNvPr id="1" name=""/>
+        <p:cNvGrpSpPr/>
+        <p:nvPr/>
+      </p:nvGrpSpPr>
+      <p:grpSpPr/>
+      <p:sp>
+        <p:nvSpPr>
+          <p:cNvPr id="2" name="TextBox 1"/>
+          <p:cNvSpPr txBox="1"/>
+          <p:nvPr/>
+        </p:nvSpPr>
+        <p:spPr>
+          <a:xfrm>
+            <a:off x="457200" y="320040"/>
+            <a:ext cx="8229600" cy="822960"/>
+          </a:xfrm>
+          <a:prstGeom prst="rect">
+            <a:avLst/>
+          </a:prstGeom>
+          <a:noFill/>
+        </p:spPr>
+        <p:txBody>
+          <a:bodyPr wrap="square">
+            <a:spAutoFit/>
+          </a:bodyPr>
+          <a:lstStyle/>
+          <a:p>
+            <a:r>
+              <a:rPr sz="2600" b="1">
+                <a:solidFill>
+                  <a:srgbClr val="0B3D2E"/>
+                </a:solidFill>
+              </a:rPr>
+              <a:t>📝 Reto verificable</a:t>
+            </a:r>
+          </a:p>
+        </p:txBody>
+      </p:sp>
+      <p:sp>
+        <p:nvSpPr>
+          <p:cNvPr id="3" name="TextBox 2"/>
+          <p:cNvSpPr txBox="1"/>
+          <p:nvPr/>
+        </p:nvSpPr>
+        <p:spPr>
+          <a:xfrm>
+            <a:off x="457200" y="1280160"/>
+            <a:ext cx="8229600" cy="4937760"/>
+          </a:xfrm>
+          <a:prstGeom prst="rect">
+            <a:avLst/>
+          </a:prstGeom>
+          <a:noFill/>
+        </p:spPr>
+        <p:txBody>
+          <a:bodyPr wrap="square">
+            <a:spAutoFit/>
+          </a:bodyPr>
+          <a:lstStyle/>
+          <a:p>
+            <a:pPr>
+              <a:spcAft>
+                <a:spcPts val="600"/>
+              </a:spcAft>
+            </a:pPr>
+            <a:r>
+              <a:rPr sz="1500">
+                <a:solidFill>
+                  <a:srgbClr val="22282E"/>
+                </a:solidFill>
+              </a:rPr>
+              <a:t>•  En un sistema de laboratorio propio, aplica tres técnicas anti-forense distintas (por ejemplo timestomping, limpieza de un log y un ADS) y luego, actuando como analista, detéctalas todas usando…</a:t>
+            </a:r>
+          </a:p>
+          <a:p>
+            <a:pPr>
+              <a:spcAft>
+                <a:spcPts val="600"/>
+              </a:spcAft>
+            </a:pPr>
+            <a:r>
+              <a:rPr sz="1500">
+                <a:solidFill>
+                  <a:srgbClr val="22282E"/>
+                </a:solidFill>
+              </a:rPr>
+              <a:t>•  Criterio de aceptación: por cada una de las tres técnicas, presentas (a) cómo la aplicaste, (b) la evidencia que la delató y (c) la fuente redundante que usaste para detectarla pese a la manipulación.</a:t>
+            </a:r>
+          </a:p>
+        </p:txBody>
+      </p:sp>
+    </p:spTree>
+  </p:cSld>
+  <p:clrMapOvr>
+    <a:masterClrMapping/>
+  </p:clrMapOvr>
+</p:sld>
+</file>
+
+<file path=ppt/slides/slide14.xml><?xml version="1.0" encoding="utf-8"?>
+<p:sld xmlns:a="http://schemas.openxmlformats.org/drawingml/2006/main" xmlns:p="http://schemas.openxmlformats.org/presentationml/2006/main" xmlns:r="http://schemas.openxmlformats.org/officeDocument/2006/relationships">
+  <p:cSld>
+    <p:spTree>
+      <p:nvGrpSpPr>
+        <p:cNvPr id="1" name=""/>
+        <p:cNvGrpSpPr/>
+        <p:nvPr/>
+      </p:nvGrpSpPr>
+      <p:grpSpPr/>
+      <p:sp>
+        <p:nvSpPr>
+          <p:cNvPr id="2" name="TextBox 1"/>
+          <p:cNvSpPr txBox="1"/>
+          <p:nvPr/>
+        </p:nvSpPr>
+        <p:spPr>
+          <a:xfrm>
+            <a:off x="457200" y="320040"/>
+            <a:ext cx="8229600" cy="822960"/>
+          </a:xfrm>
+          <a:prstGeom prst="rect">
+            <a:avLst/>
+          </a:prstGeom>
+          <a:noFill/>
+        </p:spPr>
+        <p:txBody>
+          <a:bodyPr wrap="square">
+            <a:spAutoFit/>
+          </a:bodyPr>
+          <a:lstStyle/>
+          <a:p>
+            <a:r>
+              <a:rPr sz="2600" b="1">
+                <a:solidFill>
+                  <a:srgbClr val="0B3D2E"/>
+                </a:solidFill>
+              </a:rPr>
+              <a:t>⚠️ Errores comunes</a:t>
+            </a:r>
+          </a:p>
+        </p:txBody>
+      </p:sp>
+      <p:sp>
+        <p:nvSpPr>
+          <p:cNvPr id="3" name="TextBox 2"/>
+          <p:cNvSpPr txBox="1"/>
+          <p:nvPr/>
+        </p:nvSpPr>
+        <p:spPr>
+          <a:xfrm>
+            <a:off x="457200" y="1280160"/>
+            <a:ext cx="8229600" cy="4937760"/>
+          </a:xfrm>
+          <a:prstGeom prst="rect">
+            <a:avLst/>
+          </a:prstGeom>
+          <a:noFill/>
+        </p:spPr>
+        <p:txBody>
+          <a:bodyPr wrap="square">
+            <a:spAutoFit/>
+          </a:bodyPr>
+          <a:lstStyle/>
+          <a:p>
+            <a:pPr>
+              <a:spcAft>
+                <a:spcPts val="600"/>
+              </a:spcAft>
+            </a:pPr>
+            <a:r>
+              <a:rPr sz="1500">
+                <a:solidFill>
+                  <a:srgbClr val="22282E"/>
+                </a:solidFill>
+              </a:rPr>
+              <a:t>•  Confías en un solo timestamp — Es manipulable. Cruza $SI, $FN, $UsnJrnl y logs.</a:t>
+            </a:r>
+          </a:p>
+          <a:p>
+            <a:pPr>
+              <a:spcAft>
+                <a:spcPts val="600"/>
+              </a:spcAft>
+            </a:pPr>
+            <a:r>
+              <a:rPr sz="1500">
+                <a:solidFill>
+                  <a:srgbClr val="22282E"/>
+                </a:solidFill>
+              </a:rPr>
+              <a:t>•  No ves el ADS — dir normal no lo muestra. Usa dir /r o streams.</a:t>
+            </a:r>
+          </a:p>
+          <a:p>
+            <a:pPr>
+              <a:spcAft>
+                <a:spcPts val="600"/>
+              </a:spcAft>
+            </a:pPr>
+            <a:r>
+              <a:rPr sz="1500">
+                <a:solidFill>
+                  <a:srgbClr val="22282E"/>
+                </a:solidFill>
+              </a:rPr>
+              <a:t>•  Log "limpio" sin sospecha — Un log vacío o con gaps ya es sospechoso. Revisa el evento 1102.</a:t>
+            </a:r>
+          </a:p>
+          <a:p>
+            <a:pPr>
+              <a:spcAft>
+                <a:spcPts val="600"/>
+              </a:spcAft>
+            </a:pPr>
+            <a:r>
+              <a:rPr sz="1500">
+                <a:solidFill>
+                  <a:srgbClr val="22282E"/>
+                </a:solidFill>
+              </a:rPr>
+              <a:t>•  Una herramienta no detecta esteganografía — Ningún detector cubre todos los métodos. Revisa estructura, estadísticas y contexto; compara con el portador original si existe.</a:t>
+            </a:r>
+          </a:p>
+          <a:p>
+            <a:pPr>
+              <a:spcAft>
+                <a:spcPts val="600"/>
+              </a:spcAft>
+            </a:pPr>
+            <a:r>
+              <a:rPr sz="1500">
+                <a:solidFill>
+                  <a:srgbClr val="22282E"/>
+                </a:solidFill>
+              </a:rPr>
+              <a:t>•  Asumes que el wiping borró todo — Copias en shadow copies, journal, backups o RAM pueden sobrevivir.</a:t>
+            </a:r>
+          </a:p>
+        </p:txBody>
+      </p:sp>
+    </p:spTree>
+  </p:cSld>
+  <p:clrMapOvr>
+    <a:masterClrMapping/>
+  </p:clrMapOvr>
+</p:sld>
+</file>
+
+<file path=ppt/slides/slide15.xml><?xml version="1.0" encoding="utf-8"?>
+<p:sld xmlns:a="http://schemas.openxmlformats.org/drawingml/2006/main" xmlns:p="http://schemas.openxmlformats.org/presentationml/2006/main" xmlns:r="http://schemas.openxmlformats.org/officeDocument/2006/relationships">
+  <p:cSld>
+    <p:spTree>
+      <p:nvGrpSpPr>
+        <p:cNvPr id="1" name=""/>
+        <p:cNvGrpSpPr/>
+        <p:nvPr/>
+      </p:nvGrpSpPr>
+      <p:grpSpPr/>
+      <p:sp>
+        <p:nvSpPr>
+          <p:cNvPr id="2" name="TextBox 1"/>
+          <p:cNvSpPr txBox="1"/>
+          <p:nvPr/>
+        </p:nvSpPr>
+        <p:spPr>
+          <a:xfrm>
+            <a:off x="457200" y="320040"/>
+            <a:ext cx="8229600" cy="822960"/>
+          </a:xfrm>
+          <a:prstGeom prst="rect">
+            <a:avLst/>
+          </a:prstGeom>
+          <a:noFill/>
+        </p:spPr>
+        <p:txBody>
+          <a:bodyPr wrap="square">
+            <a:spAutoFit/>
+          </a:bodyPr>
+          <a:lstStyle/>
+          <a:p>
+            <a:r>
+              <a:rPr sz="2600" b="1">
+                <a:solidFill>
+                  <a:srgbClr val="0B3D2E"/>
+                </a:solidFill>
+              </a:rPr>
+              <a:t>❓ Preguntas frecuentes</a:t>
+            </a:r>
+          </a:p>
+        </p:txBody>
+      </p:sp>
+      <p:sp>
+        <p:nvSpPr>
+          <p:cNvPr id="3" name="TextBox 2"/>
+          <p:cNvSpPr txBox="1"/>
+          <p:nvPr/>
+        </p:nvSpPr>
+        <p:spPr>
+          <a:xfrm>
+            <a:off x="457200" y="1280160"/>
+            <a:ext cx="8229600" cy="4937760"/>
+          </a:xfrm>
+          <a:prstGeom prst="rect">
+            <a:avLst/>
+          </a:prstGeom>
+          <a:noFill/>
+        </p:spPr>
+        <p:txBody>
+          <a:bodyPr wrap="square">
+            <a:spAutoFit/>
+          </a:bodyPr>
+          <a:lstStyle/>
+          <a:p>
+            <a:pPr>
+              <a:spcAft>
+                <a:spcPts val="600"/>
+              </a:spcAft>
+            </a:pPr>
+            <a:r>
+              <a:rPr sz="1500">
+                <a:solidFill>
+                  <a:srgbClr val="22282E"/>
+                </a:solidFill>
+              </a:rPr>
+              <a:t>•  ❓ ¿El anti-forense hace imposible la investigación?</a:t>
+            </a:r>
+          </a:p>
+          <a:p>
+            <a:pPr>
+              <a:spcAft>
+                <a:spcPts val="600"/>
+              </a:spcAft>
+            </a:pPr>
+            <a:r>
+              <a:rPr sz="1500">
+                <a:solidFill>
+                  <a:srgbClr val="22282E"/>
+                </a:solidFill>
+              </a:rPr>
+              <a:t>•  Puede reducir o eliminar evidencia accesible y, en otros casos, producir incoherencias o divergencias. El resultado depende del método, medio, retención y fuentes independientes disponibles.</a:t>
+            </a:r>
+          </a:p>
+          <a:p>
+            <a:pPr>
+              <a:spcAft>
+                <a:spcPts val="600"/>
+              </a:spcAft>
+            </a:pPr>
+            <a:r>
+              <a:rPr sz="1500">
+                <a:solidFill>
+                  <a:srgbClr val="22282E"/>
+                </a:solidFill>
+              </a:rPr>
+              <a:t>•  ❓ ¿Cómo detecto timestomping?</a:t>
+            </a:r>
+          </a:p>
+          <a:p>
+            <a:pPr>
+              <a:spcAft>
+                <a:spcPts val="600"/>
+              </a:spcAft>
+            </a:pPr>
+            <a:r>
+              <a:rPr sz="1500">
+                <a:solidFill>
+                  <a:srgbClr val="22282E"/>
+                </a:solidFill>
+              </a:rPr>
+              <a:t>•  Comparando timestamps y eventos con mecanismos distintos. Las incoherencias justifican investigar manipulación, copia, restauración, deriva o errores antes de concluir.</a:t>
+            </a:r>
+          </a:p>
+          <a:p>
+            <a:pPr>
+              <a:spcAft>
+                <a:spcPts val="600"/>
+              </a:spcAft>
+            </a:pPr>
+            <a:r>
+              <a:rPr sz="1500">
+                <a:solidFill>
+                  <a:srgbClr val="22282E"/>
+                </a:solidFill>
+              </a:rPr>
+              <a:t>•  ❓ ¿Qué es un LOLBin?</a:t>
+            </a:r>
+          </a:p>
+          <a:p>
+            <a:pPr>
+              <a:spcAft>
+                <a:spcPts val="600"/>
+              </a:spcAft>
+            </a:pPr>
+            <a:r>
+              <a:rPr sz="1500">
+                <a:solidFill>
+                  <a:srgbClr val="22282E"/>
+                </a:solidFill>
+              </a:rPr>
+              <a:t>•  Un binario legítimo del sistema (PowerShell, certutil, rundll32…) usado con fines maliciosos para no dejar malware propio.</a:t>
+            </a:r>
+          </a:p>
+          <a:p>
+            <a:pPr>
+              <a:spcAft>
+                <a:spcPts val="600"/>
+              </a:spcAft>
+            </a:pPr>
+            <a:r>
+              <a:rPr sz="1500">
+                <a:solidFill>
+                  <a:srgbClr val="22282E"/>
+                </a:solidFill>
+              </a:rPr>
+              <a:t>•  ❓ ¿Puedo recuperar algo tras un wipe en SSD?</a:t>
+            </a:r>
+          </a:p>
+        </p:txBody>
+      </p:sp>
+    </p:spTree>
+  </p:cSld>
+  <p:clrMapOvr>
+    <a:masterClrMapping/>
+  </p:clrMapOvr>
+</p:sld>
+</file>
+
+<file path=ppt/slides/slide16.xml><?xml version="1.0" encoding="utf-8"?>
+<p:sld xmlns:a="http://schemas.openxmlformats.org/drawingml/2006/main" xmlns:p="http://schemas.openxmlformats.org/presentationml/2006/main" xmlns:r="http://schemas.openxmlformats.org/officeDocument/2006/relationships">
+  <p:cSld>
+    <p:spTree>
+      <p:nvGrpSpPr>
+        <p:cNvPr id="1" name=""/>
+        <p:cNvGrpSpPr/>
+        <p:nvPr/>
+      </p:nvGrpSpPr>
+      <p:grpSpPr/>
+      <p:sp>
+        <p:nvSpPr>
+          <p:cNvPr id="2" name="TextBox 1"/>
+          <p:cNvSpPr txBox="1"/>
+          <p:nvPr/>
+        </p:nvSpPr>
+        <p:spPr>
+          <a:xfrm>
+            <a:off x="457200" y="320040"/>
+            <a:ext cx="8229600" cy="822960"/>
+          </a:xfrm>
+          <a:prstGeom prst="rect">
+            <a:avLst/>
+          </a:prstGeom>
+          <a:noFill/>
+        </p:spPr>
+        <p:txBody>
+          <a:bodyPr wrap="square">
+            <a:spAutoFit/>
+          </a:bodyPr>
+          <a:lstStyle/>
+          <a:p>
+            <a:r>
+              <a:rPr sz="2600" b="1">
+                <a:solidFill>
+                  <a:srgbClr val="0B3D2E"/>
+                </a:solidFill>
+              </a:rPr>
+              <a:t>🔗 Referencias verificables y alcance</a:t>
+            </a:r>
+          </a:p>
+        </p:txBody>
+      </p:sp>
+      <p:sp>
+        <p:nvSpPr>
+          <p:cNvPr id="3" name="TextBox 2"/>
+          <p:cNvSpPr txBox="1"/>
+          <p:nvPr/>
+        </p:nvSpPr>
+        <p:spPr>
+          <a:xfrm>
+            <a:off x="457200" y="1280160"/>
+            <a:ext cx="8229600" cy="4937760"/>
+          </a:xfrm>
+          <a:prstGeom prst="rect">
+            <a:avLst/>
+          </a:prstGeom>
+          <a:noFill/>
+        </p:spPr>
+        <p:txBody>
+          <a:bodyPr wrap="square">
+            <a:spAutoFit/>
+          </a:bodyPr>
+          <a:lstStyle/>
+          <a:p>
+            <a:pPr>
+              <a:spcAft>
+                <a:spcPts val="600"/>
+              </a:spcAft>
+            </a:pPr>
+            <a:r>
+              <a:rPr sz="1500">
+                <a:solidFill>
+                  <a:srgbClr val="22282E"/>
+                </a:solidFill>
+              </a:rPr>
+              <a:t>•  MITRE ATT&amp;CK T1070 — Indicator Removal: &lt;https://attack.mitre.org/techniques/T1070/&gt; — catálogo de comportamientos observados y mitigaciones; no prueba que una anomalía concreta sea adversaria.</a:t>
+            </a:r>
+          </a:p>
+          <a:p>
+            <a:pPr>
+              <a:spcAft>
+                <a:spcPts val="600"/>
+              </a:spcAft>
+            </a:pPr>
+            <a:r>
+              <a:rPr sz="1500">
+                <a:solidFill>
+                  <a:srgbClr val="22282E"/>
+                </a:solidFill>
+              </a:rPr>
+              <a:t>•  MITRE ATT&amp;CK T1070.004 — File Deletion: &lt;https://attack.mitre.org/techniques/T1070/004/&gt; — ejemplos y detecciones para borrado de archivos.</a:t>
+            </a:r>
+          </a:p>
+          <a:p>
+            <a:pPr>
+              <a:spcAft>
+                <a:spcPts val="600"/>
+              </a:spcAft>
+            </a:pPr>
+            <a:r>
+              <a:rPr sz="1500">
+                <a:solidFill>
+                  <a:srgbClr val="22282E"/>
+                </a:solidFill>
+              </a:rPr>
+              <a:t>•  MITRE ATT&amp;CK T1070.006 — Timestomp: &lt;https://attack.mitre.org/techniques/T1070/006/&gt; — comportamiento y fuentes de detección para modificación temporal.</a:t>
+            </a:r>
+          </a:p>
+          <a:p>
+            <a:pPr>
+              <a:spcAft>
+                <a:spcPts val="600"/>
+              </a:spcAft>
+            </a:pPr>
+            <a:r>
+              <a:rPr sz="1500">
+                <a:solidFill>
+                  <a:srgbClr val="22282E"/>
+                </a:solidFill>
+              </a:rPr>
+              <a:t>•  LOLBAS: &lt;https://lolbas-project.github.io/&gt; — catálogo comunitario de usos documentados de binarios legítimos; una coincidencia requiere contexto.</a:t>
+            </a:r>
+          </a:p>
+          <a:p>
+            <a:pPr>
+              <a:spcAft>
+                <a:spcPts val="600"/>
+              </a:spcAft>
+            </a:pPr>
+            <a:r>
+              <a:rPr sz="1500">
+                <a:solidFill>
+                  <a:srgbClr val="22282E"/>
+                </a:solidFill>
+              </a:rPr>
+              <a:t>•  Eric Zimmerman’s Tools: &lt;https://ericzimmerman.github.io/&gt; — documentación de herramientas para artefactos Windows; validar versión y resultados contra fuentes originales.</a:t>
+            </a:r>
+          </a:p>
+          <a:p>
+            <a:pPr>
+              <a:spcAft>
+                <a:spcPts val="600"/>
+              </a:spcAft>
+            </a:pPr>
+            <a:r>
+              <a:rPr sz="1500">
+                <a:solidFill>
+                  <a:srgbClr val="22282E"/>
+                </a:solidFill>
+              </a:rPr>
+              <a:t>•  Ligh, Case, Levy y Walters — The Art of Memory Forensics, Wiley, 2014: fundamento para análisis en memoria; los perfiles y comandos históricos no sustituyen documentación actual de Volatility 3.</a:t>
+            </a:r>
+          </a:p>
+        </p:txBody>
+      </p:sp>
+    </p:spTree>
+  </p:cSld>
+  <p:clrMapOvr>
+    <a:masterClrMapping/>
+  </p:clrMapOvr>
+</p:sld>
+</file>
+
+<file path=ppt/slides/slide17.xml><?xml version="1.0" encoding="utf-8"?>
+<p:sld xmlns:a="http://schemas.openxmlformats.org/drawingml/2006/main" xmlns:p="http://schemas.openxmlformats.org/presentationml/2006/main" xmlns:r="http://schemas.openxmlformats.org/officeDocument/2006/relationships">
+  <p:cSld>
+    <p:spTree>
+      <p:nvGrpSpPr>
+        <p:cNvPr id="1" name=""/>
+        <p:cNvGrpSpPr/>
+        <p:nvPr/>
+      </p:nvGrpSpPr>
+      <p:grpSpPr/>
+      <p:sp>
+        <p:nvSpPr>
+          <p:cNvPr id="2" name="TextBox 1"/>
+          <p:cNvSpPr txBox="1"/>
+          <p:nvPr/>
+        </p:nvSpPr>
+        <p:spPr>
+          <a:xfrm>
+            <a:off x="457200" y="274320"/>
+            <a:ext cx="8229600" cy="640080"/>
+          </a:xfrm>
+          <a:prstGeom prst="rect">
+            <a:avLst/>
+          </a:prstGeom>
+          <a:noFill/>
+        </p:spPr>
+        <p:txBody>
+          <a:bodyPr wrap="square">
+            <a:spAutoFit/>
+          </a:bodyPr>
+          <a:lstStyle/>
+          <a:p>
+            <a:r>
+              <a:rPr sz="2200" b="1">
+                <a:solidFill>
+                  <a:srgbClr val="0B3D2E"/>
+                </a:solidFill>
+              </a:rPr>
+              <a:t>Diagrama de la clase</a:t>
+            </a:r>
+          </a:p>
+        </p:txBody>
+      </p:sp>
+      <p:pic>
+        <p:nvPicPr>
+          <p:cNvPr id="3" name="Picture 2" descr="3d38623bbcaaa40d.png"/>
+          <p:cNvPicPr>
+            <a:picLocks noChangeAspect="1"/>
+          </p:cNvPicPr>
+          <p:nvPr/>
+        </p:nvPicPr>
+        <p:blipFill>
+          <a:blip r:embed="rId2"/>
+          <a:stretch>
+            <a:fillRect/>
+          </a:stretch>
+        </p:blipFill>
+        <p:spPr>
+          <a:xfrm>
+            <a:off x="457200" y="2066544"/>
+            <a:ext cx="8229600" cy="3364992"/>
+          </a:xfrm>
+          <a:prstGeom prst="rect">
+            <a:avLst/>
+          </a:prstGeom>
+        </p:spPr>
+      </p:pic>
     </p:spTree>
   </p:cSld>
   <p:clrMapOvr>
@@ -3698,7 +4374,7 @@
                   <a:srgbClr val="22282E"/>
                 </a:solidFill>
               </a:rPr>
-              <a:t>•  Conocer las técnicas que los atacantes usan para borrar sus huellas y engañar al analista —borrado seguro, timestomping, cifrado, ocultamiento, log tampering, esteganografía— y, sobre todo, aprender a detectarlas y contrarrestarlas. Al terminar sabrás reconocer cuándo alguien intentó destruir o falsear evidencia.</a:t>
+              <a:t>•  Conocer las técnicas que los atacantes usan para borrar sus huellas y engañar al analista —borrado seguro, timestomping, cifrado, ocultamiento, log tampering, esteganografía— y, sobre todo, aprender…</a:t>
             </a:r>
           </a:p>
         </p:txBody>
@@ -4092,7 +4768,7 @@
                   <a:srgbClr val="0B3D2E"/>
                 </a:solidFill>
               </a:rPr>
-              <a:t>📖 Definiciones y características</a:t>
+              <a:t>🧠 Explicación en profundidad</a:t>
             </a:r>
           </a:p>
         </p:txBody>
@@ -4130,97 +4806,97 @@
                   <a:srgbClr val="22282E"/>
                 </a:solidFill>
               </a:rPr>
-              <a:t>•  Wiping: sobrescritura para impedir recuperación. Característica: en SSD, TRIM ya complica la recuperación; en HDD, deja patrones detectables.</a:t>
-            </a:r>
-          </a:p>
-          <a:p>
-            <a:pPr>
-              <a:spcAft>
-                <a:spcPts val="600"/>
-              </a:spcAft>
-            </a:pPr>
-            <a:r>
-              <a:rPr sz="1500">
-                <a:solidFill>
-                  <a:srgbClr val="22282E"/>
-                </a:solidFill>
-              </a:rPr>
-              <a:t>•  Timestomping: alterar timestamps (p. ej. con timestomp o SetFileTime). Característica: crea incoherencias entre $SI, $FN y logs.</a:t>
-            </a:r>
-          </a:p>
-          <a:p>
-            <a:pPr>
-              <a:spcAft>
-                <a:spcPts val="600"/>
-              </a:spcAft>
-            </a:pPr>
-            <a:r>
-              <a:rPr sz="1500">
-                <a:solidFill>
-                  <a:srgbClr val="22282E"/>
-                </a:solidFill>
-              </a:rPr>
-              <a:t>•  Log tampering: borrar/editar logs (wevtutil cl, truncar /var/log). Característica: deja huecos y gaps de secuencia detectables.</a:t>
-            </a:r>
-          </a:p>
-          <a:p>
-            <a:pPr>
-              <a:spcAft>
-                <a:spcPts val="600"/>
-              </a:spcAft>
-            </a:pPr>
-            <a:r>
-              <a:rPr sz="1500">
-                <a:solidFill>
-                  <a:srgbClr val="22282E"/>
-                </a:solidFill>
-              </a:rPr>
-              <a:t>•  Esteganografía: ocultar datos dentro de imágenes, audio, etc. Característica: cambia estadísticas del portador.</a:t>
-            </a:r>
-          </a:p>
-          <a:p>
-            <a:pPr>
-              <a:spcAft>
-                <a:spcPts val="600"/>
-              </a:spcAft>
-            </a:pPr>
-            <a:r>
-              <a:rPr sz="1500">
-                <a:solidFill>
-                  <a:srgbClr val="22282E"/>
-                </a:solidFill>
-              </a:rPr>
-              <a:t>•  Cifrado/ADS: cifrar datos o esconderlos en Alternate Data Streams de NTFS. Característica: los ADS son invisibles en un dir normal.</a:t>
-            </a:r>
-          </a:p>
-          <a:p>
-            <a:pPr>
-              <a:spcAft>
-                <a:spcPts val="600"/>
-              </a:spcAft>
-            </a:pPr>
-            <a:r>
-              <a:rPr sz="1500">
-                <a:solidFill>
-                  <a:srgbClr val="22282E"/>
-                </a:solidFill>
-              </a:rPr>
-              <a:t>•  LOLBins: binarios legítimos del SO usados con fines maliciosos. Característica: no dejan un ejecutable ajeno que analizar.</a:t>
-            </a:r>
-          </a:p>
-          <a:p>
-            <a:pPr>
-              <a:spcAft>
-                <a:spcPts val="600"/>
-              </a:spcAft>
-            </a:pPr>
-            <a:r>
-              <a:rPr sz="1500">
-                <a:solidFill>
-                  <a:srgbClr val="22282E"/>
-                </a:solidFill>
-              </a:rPr>
-              <a:t>•  Redundancia de evidencia: cruzar fuentes independientes. Característica: la mejor contramedida contra la manipulación.</a:t>
+              <a:t>•  Anti-forense agrupa acciones para destruir, ocultar, alterar o volver ambigua la evidencia. Detectarla no autoriza asumir culpabilidad: limpieza rutinaria, privacidad, rotación y errores producen…</a:t>
+            </a:r>
+          </a:p>
+          <a:p>
+            <a:pPr>
+              <a:spcAft>
+                <a:spcPts val="600"/>
+              </a:spcAft>
+            </a:pPr>
+            <a:r>
+              <a:rPr sz="1500">
+                <a:solidFill>
+                  <a:srgbClr val="22282E"/>
+                </a:solidFill>
+              </a:rPr>
+              <a:t>•  Timestomping puede generar discordancia entre MACB, journal y eventos; borrado seguro reduce carving; cifrado impide contenido pero deja contexto; log clearing puede producir eventos o huecos.…</a:t>
+            </a:r>
+          </a:p>
+          <a:p>
+            <a:pPr>
+              <a:spcAft>
+                <a:spcPts val="600"/>
+              </a:spcAft>
+            </a:pPr>
+            <a:r>
+              <a:rPr sz="1500">
+                <a:solidFill>
+                  <a:srgbClr val="22282E"/>
+                </a:solidFill>
+              </a:rPr>
+              <a:t>•  El borrado y la sobrescritura intentan reducir contenido recuperable; el timestomping altera metadatos; el cifrado y ADS ocultan acceso o visibilidad; living off the land usa herramientas presentes…</a:t>
+            </a:r>
+          </a:p>
+          <a:p>
+            <a:pPr>
+              <a:spcAft>
+                <a:spcPts val="600"/>
+              </a:spcAft>
+            </a:pPr>
+            <a:r>
+              <a:rPr sz="1500">
+                <a:solidFill>
+                  <a:srgbClr val="22282E"/>
+                </a:solidFill>
+              </a:rPr>
+              <a:t>•  El término anti-forense describe una intención o efecto posible, no una conclusión automática. Rotación legítima, restauraciones, sincronización, herramientas administrativas y fallos de disco pueden…</a:t>
+            </a:r>
+          </a:p>
+          <a:p>
+            <a:pPr>
+              <a:spcAft>
+                <a:spcPts val="600"/>
+              </a:spcAft>
+            </a:pPr>
+            <a:r>
+              <a:rPr sz="1500">
+                <a:solidFill>
+                  <a:srgbClr val="22282E"/>
+                </a:solidFill>
+              </a:rPr>
+              <a:t>•  En NTFS, $STANDARDINFORMATION, $FILENAME, USN Journal y eventos poseen mecanismos diferentes, pero ninguno es incorruptible ni está siempre disponible. Un tiempo discordante orienta hacia copia…</a:t>
+            </a:r>
+          </a:p>
+          <a:p>
+            <a:pPr>
+              <a:spcAft>
+                <a:spcPts val="600"/>
+              </a:spcAft>
+            </a:pPr>
+            <a:r>
+              <a:rPr sz="1500">
+                <a:solidFill>
+                  <a:srgbClr val="22282E"/>
+                </a:solidFill>
+              </a:rPr>
+              <a:t>•  En SSD, TRIM y recolección de basura dependen del dispositivo, sistema y tiempo; no se afirma recuperación imposible sin probar. Un carver que no encuentra contenido solo demuestra el resultado del…</a:t>
+            </a:r>
+          </a:p>
+          <a:p>
+            <a:pPr>
+              <a:spcAft>
+                <a:spcPts val="600"/>
+              </a:spcAft>
+            </a:pPr>
+            <a:r>
+              <a:rPr sz="1500">
+                <a:solidFill>
+                  <a:srgbClr val="22282E"/>
+                </a:solidFill>
+              </a:rPr>
+              <a:t>•  La contramedida más sólida es arquitectónica: sincronización temporal, forwarding autenticado, almacenamiento con controles de retención, registros cloud separados, telemetría de identidad y alertas…</a:t>
             </a:r>
           </a:p>
         </p:txBody>
@@ -4271,7 +4947,7 @@
                   <a:srgbClr val="0B3D2E"/>
                 </a:solidFill>
               </a:rPr>
-              <a:t>🧰 Herramientas y preparación</a:t>
+              <a:t>📔 Glosario</a:t>
             </a:r>
           </a:p>
         </p:txBody>
@@ -4309,37 +4985,97 @@
                   <a:srgbClr val="22282E"/>
                 </a:solidFill>
               </a:rPr>
-              <a:t>•  Detección: MFTECmd ($SI vs $FN), EvtxECmd (gaps de secuencia), streams/dir /r (ADS), stegdetect/zsteg (esteganografía), binwalk.</a:t>
-            </a:r>
-          </a:p>
-          <a:p>
-            <a:pPr>
-              <a:spcAft>
-                <a:spcPts val="600"/>
-              </a:spcAft>
-            </a:pPr>
-            <a:r>
-              <a:rPr sz="1500">
-                <a:solidFill>
-                  <a:srgbClr val="22282E"/>
-                </a:solidFill>
-              </a:rPr>
-              <a:t>•  Análisis de wiping: inspección de patrones en espacio no asignado.</a:t>
-            </a:r>
-          </a:p>
-          <a:p>
-            <a:pPr>
-              <a:spcAft>
-                <a:spcPts val="600"/>
-              </a:spcAft>
-            </a:pPr>
-            <a:r>
-              <a:rPr sz="1500">
-                <a:solidFill>
-                  <a:srgbClr val="22282E"/>
-                </a:solidFill>
-              </a:rPr>
-              <a:t>•  Entorno: laboratorio propio. Genera tú las técnicas y luego detéctalas.</a:t>
+              <a:t>•  Anti-forense: interferencia con adquisición o interpretación.</a:t>
+            </a:r>
+          </a:p>
+          <a:p>
+            <a:pPr>
+              <a:spcAft>
+                <a:spcPts val="600"/>
+              </a:spcAft>
+            </a:pPr>
+            <a:r>
+              <a:rPr sz="1500">
+                <a:solidFill>
+                  <a:srgbClr val="22282E"/>
+                </a:solidFill>
+              </a:rPr>
+              <a:t>•  Timestomping: alteración de timestamps.</a:t>
+            </a:r>
+          </a:p>
+          <a:p>
+            <a:pPr>
+              <a:spcAft>
+                <a:spcPts val="600"/>
+              </a:spcAft>
+            </a:pPr>
+            <a:r>
+              <a:rPr sz="1500">
+                <a:solidFill>
+                  <a:srgbClr val="22282E"/>
+                </a:solidFill>
+              </a:rPr>
+              <a:t>•  Log tampering: modificación o eliminación de registros.</a:t>
+            </a:r>
+          </a:p>
+          <a:p>
+            <a:pPr>
+              <a:spcAft>
+                <a:spcPts val="600"/>
+              </a:spcAft>
+            </a:pPr>
+            <a:r>
+              <a:rPr sz="1500">
+                <a:solidFill>
+                  <a:srgbClr val="22282E"/>
+                </a:solidFill>
+              </a:rPr>
+              <a:t>•  Secure deletion: sobrescritura o descarte criptográfico.</a:t>
+            </a:r>
+          </a:p>
+          <a:p>
+            <a:pPr>
+              <a:spcAft>
+                <a:spcPts val="600"/>
+              </a:spcAft>
+            </a:pPr>
+            <a:r>
+              <a:rPr sz="1500">
+                <a:solidFill>
+                  <a:srgbClr val="22282E"/>
+                </a:solidFill>
+              </a:rPr>
+              <a:t>•  Data hiding: ocultación en ubicaciones no evidentes.</a:t>
+            </a:r>
+          </a:p>
+          <a:p>
+            <a:pPr>
+              <a:spcAft>
+                <a:spcPts val="600"/>
+              </a:spcAft>
+            </a:pPr>
+            <a:r>
+              <a:rPr sz="1500">
+                <a:solidFill>
+                  <a:srgbClr val="22282E"/>
+                </a:solidFill>
+              </a:rPr>
+              <a:t>•  Fuente independiente: evidencia fuera del control comprometido.</a:t>
+            </a:r>
+          </a:p>
+          <a:p>
+            <a:pPr>
+              <a:spcAft>
+                <a:spcPts val="600"/>
+              </a:spcAft>
+            </a:pPr>
+            <a:r>
+              <a:rPr sz="1500">
+                <a:solidFill>
+                  <a:srgbClr val="22282E"/>
+                </a:solidFill>
+              </a:rPr>
+              <a:t>•  Inmutabilidad: protección contra modificación durante retención.</a:t>
             </a:r>
           </a:p>
         </p:txBody>
@@ -4390,7 +5126,7 @@
                   <a:srgbClr val="0B3D2E"/>
                 </a:solidFill>
               </a:rPr>
-              <a:t>🧪 Laboratorio guiado</a:t>
+              <a:t>📖 Definiciones y características</a:t>
             </a:r>
           </a:p>
         </p:txBody>
@@ -4428,97 +5164,97 @@
                   <a:srgbClr val="22282E"/>
                 </a:solidFill>
               </a:rPr>
-              <a:t>•  Timestomping y su detección: cambia el mtime de un archivo propio y detéctalo comparando $SI vs $FN en la MFT:</a:t>
-            </a:r>
-          </a:p>
-          <a:p>
-            <a:pPr>
-              <a:spcAft>
-                <a:spcPts val="600"/>
-              </a:spcAft>
-            </a:pPr>
-            <a:r>
-              <a:rPr sz="1500">
-                <a:solidFill>
-                  <a:srgbClr val="22282E"/>
-                </a:solidFill>
-              </a:rPr>
-              <a:t>•  MFTECmd.exe -f "$MFT" --csv salida --csvf mft.csv</a:t>
-            </a:r>
-          </a:p>
-          <a:p>
-            <a:pPr>
-              <a:spcAft>
-                <a:spcPts val="600"/>
-              </a:spcAft>
-            </a:pPr>
-            <a:r>
-              <a:rPr sz="1500">
-                <a:solidFill>
-                  <a:srgbClr val="22282E"/>
-                </a:solidFill>
-              </a:rPr>
-              <a:t>•  Busca registros donde los tiempos de $SI sean anteriores a los de $FN (imposible en uso normal).</a:t>
-            </a:r>
-          </a:p>
-          <a:p>
-            <a:pPr>
-              <a:spcAft>
-                <a:spcPts val="600"/>
-              </a:spcAft>
-            </a:pPr>
-            <a:r>
-              <a:rPr sz="1500">
-                <a:solidFill>
-                  <a:srgbClr val="22282E"/>
-                </a:solidFill>
-              </a:rPr>
-              <a:t>•  Alternate Data Streams: crea y detecta un ADS en NTFS:</a:t>
-            </a:r>
-          </a:p>
-          <a:p>
-            <a:pPr>
-              <a:spcAft>
-                <a:spcPts val="600"/>
-              </a:spcAft>
-            </a:pPr>
-            <a:r>
-              <a:rPr sz="1500">
-                <a:solidFill>
-                  <a:srgbClr val="22282E"/>
-                </a:solidFill>
-              </a:rPr>
-              <a:t>•  echo secreto &gt; archivo.txt:oculto.txt</a:t>
-            </a:r>
-          </a:p>
-          <a:p>
-            <a:pPr>
-              <a:spcAft>
-                <a:spcPts val="600"/>
-              </a:spcAft>
-            </a:pPr>
-            <a:r>
-              <a:rPr sz="1500">
-                <a:solidFill>
-                  <a:srgbClr val="22282E"/>
-                </a:solidFill>
-              </a:rPr>
-              <a:t>•  dir /r</a:t>
-            </a:r>
-          </a:p>
-          <a:p>
-            <a:pPr>
-              <a:spcAft>
-                <a:spcPts val="600"/>
-              </a:spcAft>
-            </a:pPr>
-            <a:r>
-              <a:rPr sz="1500">
-                <a:solidFill>
-                  <a:srgbClr val="22282E"/>
-                </a:solidFill>
-              </a:rPr>
-              <a:t>•  Limpieza de logs: borra un log de eventos propio y detecta el hueco:</a:t>
+              <a:t>•  Wiping: sobrescritura u otra operación destinada a reducir recuperación. Característica: el resultado depende del medio, método, cobertura y verificación.</a:t>
+            </a:r>
+          </a:p>
+          <a:p>
+            <a:pPr>
+              <a:spcAft>
+                <a:spcPts val="600"/>
+              </a:spcAft>
+            </a:pPr>
+            <a:r>
+              <a:rPr sz="1500">
+                <a:solidFill>
+                  <a:srgbClr val="22282E"/>
+                </a:solidFill>
+              </a:rPr>
+              <a:t>•  Timestomping: alterar timestamps para dificultar la cronología. Característica: puede crear incoherencias entre metadatos y fuentes externas, pero estas requieren explicación contextual.</a:t>
+            </a:r>
+          </a:p>
+          <a:p>
+            <a:pPr>
+              <a:spcAft>
+                <a:spcPts val="600"/>
+              </a:spcAft>
+            </a:pPr>
+            <a:r>
+              <a:rPr sz="1500">
+                <a:solidFill>
+                  <a:srgbClr val="22282E"/>
+                </a:solidFill>
+              </a:rPr>
+              <a:t>•  Log tampering: borrar, truncar o alterar registros. Característica: puede dejar eventos, cambios de secuencia o divergencias con colectores, según plataforma y configuración.</a:t>
+            </a:r>
+          </a:p>
+          <a:p>
+            <a:pPr>
+              <a:spcAft>
+                <a:spcPts val="600"/>
+              </a:spcAft>
+            </a:pPr>
+            <a:r>
+              <a:rPr sz="1500">
+                <a:solidFill>
+                  <a:srgbClr val="22282E"/>
+                </a:solidFill>
+              </a:rPr>
+              <a:t>•  Esteganografía: ocultar información dentro de otro portador. Característica: algunos métodos alteran estructura o estadísticas, pero no existe un indicador universal.</a:t>
+            </a:r>
+          </a:p>
+          <a:p>
+            <a:pPr>
+              <a:spcAft>
+                <a:spcPts val="600"/>
+              </a:spcAft>
+            </a:pPr>
+            <a:r>
+              <a:rPr sz="1500">
+                <a:solidFill>
+                  <a:srgbClr val="22282E"/>
+                </a:solidFill>
+              </a:rPr>
+              <a:t>•  Cifrado/ADS: cifrar datos o esconderlos en Alternate Data Streams de NTFS. Característica: los ADS son invisibles en un dir normal.</a:t>
+            </a:r>
+          </a:p>
+          <a:p>
+            <a:pPr>
+              <a:spcAft>
+                <a:spcPts val="600"/>
+              </a:spcAft>
+            </a:pPr>
+            <a:r>
+              <a:rPr sz="1500">
+                <a:solidFill>
+                  <a:srgbClr val="22282E"/>
+                </a:solidFill>
+              </a:rPr>
+              <a:t>•  LOLBins: binarios legítimos del SO usados con fines maliciosos. Característica: no dejan un ejecutable ajeno que analizar.</a:t>
+            </a:r>
+          </a:p>
+          <a:p>
+            <a:pPr>
+              <a:spcAft>
+                <a:spcPts val="600"/>
+              </a:spcAft>
+            </a:pPr>
+            <a:r>
+              <a:rPr sz="1500">
+                <a:solidFill>
+                  <a:srgbClr val="22282E"/>
+                </a:solidFill>
+              </a:rPr>
+              <a:t>•  Redundancia de evidencia: cruzar fuentes con mecanismos y dominios de control distintos. Característica: aumenta capacidad de corroboración y hace visibles contradicciones.</a:t>
             </a:r>
           </a:p>
         </p:txBody>
@@ -4569,7 +5305,7 @@
                   <a:srgbClr val="0B3D2E"/>
                 </a:solidFill>
               </a:rPr>
-              <a:t>✍️ Ejercicios</a:t>
+              <a:t>🔍 Caso razonado — registro limpiado y ejecutable con tiempos antiguos</a:t>
             </a:r>
           </a:p>
         </p:txBody>
@@ -4607,82 +5343,22 @@
                   <a:srgbClr val="22282E"/>
                 </a:solidFill>
               </a:rPr>
-              <a:t>•  Detecta timestomping por incoherencia $SI/$FN.</a:t>
-            </a:r>
-          </a:p>
-          <a:p>
-            <a:pPr>
-              <a:spcAft>
-                <a:spcPts val="600"/>
-              </a:spcAft>
-            </a:pPr>
-            <a:r>
-              <a:rPr sz="1500">
-                <a:solidFill>
-                  <a:srgbClr val="22282E"/>
-                </a:solidFill>
-              </a:rPr>
-              <a:t>•  Crea y encuentra un ADS en NTFS.</a:t>
-            </a:r>
-          </a:p>
-          <a:p>
-            <a:pPr>
-              <a:spcAft>
-                <a:spcPts val="600"/>
-              </a:spcAft>
-            </a:pPr>
-            <a:r>
-              <a:rPr sz="1500">
-                <a:solidFill>
-                  <a:srgbClr val="22282E"/>
-                </a:solidFill>
-              </a:rPr>
-              <a:t>•  Identifica una limpieza de log por el evento 1102.</a:t>
-            </a:r>
-          </a:p>
-          <a:p>
-            <a:pPr>
-              <a:spcAft>
-                <a:spcPts val="600"/>
-              </a:spcAft>
-            </a:pPr>
-            <a:r>
-              <a:rPr sz="1500">
-                <a:solidFill>
-                  <a:srgbClr val="22282E"/>
-                </a:solidFill>
-              </a:rPr>
-              <a:t>•  Detecta datos ocultos en una imagen con zsteg/binwalk.</a:t>
-            </a:r>
-          </a:p>
-          <a:p>
-            <a:pPr>
-              <a:spcAft>
-                <a:spcPts val="600"/>
-              </a:spcAft>
-            </a:pPr>
-            <a:r>
-              <a:rPr sz="1500">
-                <a:solidFill>
-                  <a:srgbClr val="22282E"/>
-                </a:solidFill>
-              </a:rPr>
-              <a:t>•  Explica por qué el TRIM ayuda al atacante que quiere borrar.</a:t>
-            </a:r>
-          </a:p>
-          <a:p>
-            <a:pPr>
-              <a:spcAft>
-                <a:spcPts val="600"/>
-              </a:spcAft>
-            </a:pPr>
-            <a:r>
-              <a:rPr sz="1500">
-                <a:solidFill>
-                  <a:srgbClr val="22282E"/>
-                </a:solidFill>
-              </a:rPr>
-              <a:t>•  Diseña una estrategia de redundancia de evidencia contra cada técnica.</a:t>
+              <a:t>•  Un servidor muestra el evento de limpieza del registro y un ejecutable recién descubierto conserva fechas anteriores a su instalación. La hipótesis maliciosa es limpieza y timestomping; la…</a:t>
+            </a:r>
+          </a:p>
+          <a:p>
+            <a:pPr>
+              <a:spcAft>
+                <a:spcPts val="600"/>
+              </a:spcAft>
+            </a:pPr>
+            <a:r>
+              <a:rPr sz="1500">
+                <a:solidFill>
+                  <a:srgbClr val="22282E"/>
+                </a:solidFill>
+              </a:rPr>
+              <a:t>•  La conclusión no depende del «archivo viejo». Se apoya en la convergencia de descarga, creación de persistencia, uso anómalo de identidad y divergencia local/remota. Las fechas se describen como…</a:t>
             </a:r>
           </a:p>
         </p:txBody>
@@ -4733,7 +5409,7 @@
                   <a:srgbClr val="0B3D2E"/>
                 </a:solidFill>
               </a:rPr>
-              <a:t>📝 Reto verificable</a:t>
+              <a:t>✅ Criterio de dominio</a:t>
             </a:r>
           </a:p>
         </p:txBody>
@@ -4771,22 +5447,7 @@
                   <a:srgbClr val="22282E"/>
                 </a:solidFill>
               </a:rPr>
-              <a:t>•  En un sistema de laboratorio propio, aplica tres técnicas anti-forense distintas (por ejemplo timestomping, limpieza de un log y un ADS) y luego, actuando como analista, detéctalas todas usando fuentes de evidencia independientes.</a:t>
-            </a:r>
-          </a:p>
-          <a:p>
-            <a:pPr>
-              <a:spcAft>
-                <a:spcPts val="600"/>
-              </a:spcAft>
-            </a:pPr>
-            <a:r>
-              <a:rPr sz="1500">
-                <a:solidFill>
-                  <a:srgbClr val="22282E"/>
-                </a:solidFill>
-              </a:rPr>
-              <a:t>•  Criterio de aceptación: por cada una de las tres técnicas, presentas (a) cómo la aplicaste, (b) la evidencia que la delató y (c) la fuente redundante que usaste para detectarla pese a la manipulación.</a:t>
+              <a:t>•  Dominas la clase cuando clasificas una técnica por el efecto sobre evidencia, propones explicaciones alternativas, eliges fuentes fuera del dominio comprometido, distingues ausencia de resultado de…</a:t>
             </a:r>
           </a:p>
         </p:txBody>
